--- a/slide/themes/src/16_crystalline.pptx
+++ b/slide/themes/src/16_crystalline.pptx
@@ -11014,9 +11014,6 @@
                     <a:lumOff val="25000"/>
                   </a:schemeClr>
                 </a:solidFill>
-                <a:latin typeface="Arial Black"/>
-                <a:ea typeface="Arial Black"/>
-                <a:cs typeface="Arial Black"/>
               </a:defRPr>
             </a:lvl1pPr>
             <a:lvl2pPr>
@@ -11027,9 +11024,6 @@
                     <a:lumOff val="25000"/>
                   </a:schemeClr>
                 </a:solidFill>
-                <a:latin typeface="Noto Sans KR Black"/>
-                <a:ea typeface="Noto Sans KR Black"/>
-                <a:cs typeface="Noto Sans KR Black"/>
               </a:defRPr>
             </a:lvl2pPr>
             <a:lvl3pPr>
@@ -11040,9 +11034,6 @@
                     <a:lumOff val="25000"/>
                   </a:schemeClr>
                 </a:solidFill>
-                <a:latin typeface="Noto Sans KR Black"/>
-                <a:ea typeface="Noto Sans KR Black"/>
-                <a:cs typeface="Noto Sans KR Black"/>
               </a:defRPr>
             </a:lvl3pPr>
             <a:lvl4pPr>
@@ -11053,9 +11044,6 @@
                     <a:lumOff val="25000"/>
                   </a:schemeClr>
                 </a:solidFill>
-                <a:latin typeface="Noto Sans KR Black"/>
-                <a:ea typeface="Noto Sans KR Black"/>
-                <a:cs typeface="Noto Sans KR Black"/>
               </a:defRPr>
             </a:lvl4pPr>
             <a:lvl5pPr>
@@ -11066,9 +11054,6 @@
                     <a:lumOff val="25000"/>
                   </a:schemeClr>
                 </a:solidFill>
-                <a:latin typeface="Noto Sans KR Black"/>
-                <a:ea typeface="Noto Sans KR Black"/>
-                <a:cs typeface="Noto Sans KR Black"/>
               </a:defRPr>
             </a:lvl5pPr>
             <a:lvl6pPr>
@@ -11079,9 +11064,6 @@
                     <a:lumOff val="25000"/>
                   </a:schemeClr>
                 </a:solidFill>
-                <a:latin typeface="Noto Sans KR Black"/>
-                <a:ea typeface="Noto Sans KR Black"/>
-                <a:cs typeface="Noto Sans KR Black"/>
               </a:defRPr>
             </a:lvl6pPr>
             <a:lvl7pPr>
@@ -11092,9 +11074,6 @@
                     <a:lumOff val="25000"/>
                   </a:schemeClr>
                 </a:solidFill>
-                <a:latin typeface="Noto Sans KR Black"/>
-                <a:ea typeface="Noto Sans KR Black"/>
-                <a:cs typeface="Noto Sans KR Black"/>
               </a:defRPr>
             </a:lvl7pPr>
             <a:lvl8pPr>
@@ -11105,9 +11084,6 @@
                     <a:lumOff val="25000"/>
                   </a:schemeClr>
                 </a:solidFill>
-                <a:latin typeface="Noto Sans KR Black"/>
-                <a:ea typeface="Noto Sans KR Black"/>
-                <a:cs typeface="Noto Sans KR Black"/>
               </a:defRPr>
             </a:lvl8pPr>
             <a:lvl9pPr>
@@ -11118,9 +11094,6 @@
                     <a:lumOff val="25000"/>
                   </a:schemeClr>
                 </a:solidFill>
-                <a:latin typeface="Noto Sans KR Black"/>
-                <a:ea typeface="Noto Sans KR Black"/>
-                <a:cs typeface="Noto Sans KR Black"/>
               </a:defRPr>
             </a:lvl9pPr>
           </a:lstStyle>
@@ -11162,75 +11135,39 @@
           <a:lstStyle>
             <a:lvl1pPr>
               <a:buNone/>
-              <a:defRPr sz="2600">
-                <a:latin typeface="Arial"/>
-                <a:ea typeface="Arial"/>
-                <a:cs typeface="Arial"/>
-              </a:defRPr>
+              <a:defRPr sz="2600"/>
             </a:lvl1pPr>
             <a:lvl2pPr>
               <a:buNone/>
-              <a:defRPr>
-                <a:latin typeface="Arial"/>
-                <a:ea typeface="Arial"/>
-                <a:cs typeface="Arial"/>
-              </a:defRPr>
+              <a:defRPr/>
             </a:lvl2pPr>
             <a:lvl3pPr>
               <a:buNone/>
-              <a:defRPr>
-                <a:latin typeface="Arial"/>
-                <a:ea typeface="Arial"/>
-                <a:cs typeface="Arial"/>
-              </a:defRPr>
+              <a:defRPr/>
             </a:lvl3pPr>
             <a:lvl4pPr>
               <a:buNone/>
-              <a:defRPr>
-                <a:latin typeface="Arial"/>
-                <a:ea typeface="Arial"/>
-                <a:cs typeface="Arial"/>
-              </a:defRPr>
+              <a:defRPr/>
             </a:lvl4pPr>
             <a:lvl5pPr>
               <a:buNone/>
-              <a:defRPr>
-                <a:latin typeface="Arial"/>
-                <a:ea typeface="Arial"/>
-                <a:cs typeface="Arial"/>
-              </a:defRPr>
+              <a:defRPr/>
             </a:lvl5pPr>
             <a:lvl6pPr>
               <a:buNone/>
-              <a:defRPr>
-                <a:latin typeface="Arial"/>
-                <a:ea typeface="Arial"/>
-                <a:cs typeface="Arial"/>
-              </a:defRPr>
+              <a:defRPr/>
             </a:lvl6pPr>
             <a:lvl7pPr>
               <a:buNone/>
-              <a:defRPr>
-                <a:latin typeface="Arial"/>
-                <a:ea typeface="Arial"/>
-                <a:cs typeface="Arial"/>
-              </a:defRPr>
+              <a:defRPr/>
             </a:lvl7pPr>
             <a:lvl8pPr>
               <a:buNone/>
-              <a:defRPr>
-                <a:latin typeface="Arial"/>
-                <a:ea typeface="Arial"/>
-                <a:cs typeface="Arial"/>
-              </a:defRPr>
+              <a:defRPr/>
             </a:lvl8pPr>
             <a:lvl9pPr>
               <a:buNone/>
-              <a:defRPr>
-                <a:latin typeface="Arial"/>
-                <a:ea typeface="Arial"/>
-                <a:cs typeface="Arial"/>
-              </a:defRPr>
+              <a:defRPr/>
             </a:lvl9pPr>
           </a:lstStyle>
           <a:p>
@@ -11832,13 +11769,13 @@
     </a:clrScheme>
     <a:fontScheme name="Office Theme">
       <a:majorFont>
-        <a:latin typeface="Arial"/>
-        <a:ea typeface="SimSun"/>
+        <a:latin typeface="Arial Black"/>
+        <a:ea typeface="SimHei"/>
         <a:cs typeface="Arial"/>
       </a:majorFont>
       <a:minorFont>
         <a:latin typeface="Arial"/>
-        <a:ea typeface="SimSun"/>
+        <a:ea typeface="Microsoft YaHei"/>
         <a:cs typeface="Arial"/>
       </a:minorFont>
     </a:fontScheme>
@@ -12069,13 +12006,13 @@
     </a:clrScheme>
     <a:fontScheme name="Arial">
       <a:majorFont>
-        <a:latin typeface="Arial"/>
-        <a:ea typeface="Arial"/>
+        <a:latin typeface="Arial Black"/>
+        <a:ea typeface="SimHei"/>
         <a:cs typeface="Arial"/>
       </a:majorFont>
       <a:minorFont>
         <a:latin typeface="Arial"/>
-        <a:ea typeface="Arial"/>
+        <a:ea typeface="Microsoft YaHei"/>
         <a:cs typeface="Arial"/>
       </a:minorFont>
     </a:fontScheme>

--- a/slide/themes/src/16_crystalline.pptx
+++ b/slide/themes/src/16_crystalline.pptx
@@ -536,10 +536,7 @@
             <a:pPr>
               <a:defRPr/>
             </a:pPr>
-            <a:endParaRPr lang="en-US">
-              <a:latin typeface="Arial"/>
-              <a:cs typeface="Arial"/>
-            </a:endParaRPr>
+            <a:endParaRPr lang="en-US"/>
           </a:p>
         </p:txBody>
       </p:sp>
